--- a/macjee/MacJee_p50_BU_size.pptx
+++ b/macjee/MacJee_p50_BU_size.pptx
@@ -1187,7 +1187,7 @@
                 <a:ea typeface="Montserrat" pitchFamily="34" charset="-122"/>
                 <a:cs typeface="Montserrat" pitchFamily="34" charset="-120"/>
               </a:rPr>
-              <a:t>55 named programmes across 21 countries — 1.1x the entire 2026–32 revenue plan, already identified commercially</a:t>
+              <a:t>49 valued programmes across 21 countries — 1.1x the entire 2026–32 revenue plan, already identified commercially</a:t>
             </a:r>
             <a:endParaRPr lang="en-US" sz="1200" dirty="0"/>
           </a:p>
@@ -1531,7 +1531,7 @@
                 <a:ea typeface="Montserrat" pitchFamily="34" charset="-122"/>
                 <a:cs typeface="Montserrat" pitchFamily="34" charset="-120"/>
               </a:rPr>
-              <a:t>Named programmes</a:t>
+              <a:t>Valued programmes</a:t>
             </a:r>
             <a:endParaRPr lang="en-US" sz="760" dirty="0"/>
           </a:p>
@@ -1570,7 +1570,7 @@
                 <a:ea typeface="Montserrat" pitchFamily="34" charset="-122"/>
                 <a:cs typeface="Montserrat" pitchFamily="34" charset="-120"/>
               </a:rPr>
-              <a:t>55</a:t>
+              <a:t>49</a:t>
             </a:r>
             <a:endParaRPr lang="en-US" sz="950" dirty="0"/>
           </a:p>
@@ -2129,7 +2129,7 @@
                 <a:ea typeface="Montserrat" pitchFamily="34" charset="-122"/>
                 <a:cs typeface="Montserrat" pitchFamily="34" charset="-120"/>
               </a:rPr>
-              <a:t>34 programmes  ·  11 countries</a:t>
+              <a:t>30 programmes  ·  12 countries</a:t>
             </a:r>
             <a:endParaRPr lang="en-US" sz="800" dirty="0"/>
           </a:p>
@@ -3053,7 +3053,7 @@
                 <a:ea typeface="Montserrat" pitchFamily="34" charset="-122"/>
                 <a:cs typeface="Montserrat" pitchFamily="34" charset="-120"/>
               </a:rPr>
-              <a:t>9 programmes  ·  5 countries</a:t>
+              <a:t>7 programmes  ·  6 countries</a:t>
             </a:r>
             <a:endParaRPr lang="en-US" sz="800" dirty="0"/>
           </a:p>
@@ -3209,7 +3209,7 @@
                 <a:ea typeface="Montserrat Light" pitchFamily="34" charset="-122"/>
                 <a:cs typeface="Montserrat Light" pitchFamily="34" charset="-120"/>
               </a:rPr>
-              <a:t>Identified opportunity is the total contract value of every signed contract and open commercial opportunity in the Company’s commercial review, at face value and unweighted. Coverage compares it with cumulative gross revenue in the 2026–32 plan.</a:t>
+              <a:t>Identified opportunity is the total contract value of every signed contract and open commercial opportunity in the Company’s commercial review, at face value and unweighted; a further six identified programmes carry no value yet and are excluded. Coverage compares it with cumulative gross revenue in the 2026–32 plan.</a:t>
             </a:r>
             <a:endParaRPr lang="en-US" sz="660" dirty="0"/>
           </a:p>
